--- a/QOMOTech_软件使用说明.pptx
+++ b/QOMOTech_软件使用说明.pptx
@@ -316,7 +316,7 @@
           <a:p>
             <a:fld id="{5BCAD085-E8A6-8845-BD4E-CB4CCA059FC4}" type="datetimeFigureOut">
               <a:rPr lang="en-US" smtClean="0"/>
-              <a:t>3/28/2026</a:t>
+              <a:t>3/30/2026</a:t>
             </a:fld>
             <a:endParaRPr lang="en-US"/>
           </a:p>
@@ -484,7 +484,7 @@
           <a:p>
             <a:fld id="{5BCAD085-E8A6-8845-BD4E-CB4CCA059FC4}" type="datetimeFigureOut">
               <a:rPr lang="en-US" smtClean="0"/>
-              <a:t>3/28/2026</a:t>
+              <a:t>3/30/2026</a:t>
             </a:fld>
             <a:endParaRPr lang="en-US"/>
           </a:p>
@@ -662,7 +662,7 @@
           <a:p>
             <a:fld id="{5BCAD085-E8A6-8845-BD4E-CB4CCA059FC4}" type="datetimeFigureOut">
               <a:rPr lang="en-US" smtClean="0"/>
-              <a:t>3/28/2026</a:t>
+              <a:t>3/30/2026</a:t>
             </a:fld>
             <a:endParaRPr lang="en-US"/>
           </a:p>
@@ -830,7 +830,7 @@
           <a:p>
             <a:fld id="{5BCAD085-E8A6-8845-BD4E-CB4CCA059FC4}" type="datetimeFigureOut">
               <a:rPr lang="en-US" smtClean="0"/>
-              <a:t>3/28/2026</a:t>
+              <a:t>3/30/2026</a:t>
             </a:fld>
             <a:endParaRPr lang="en-US"/>
           </a:p>
@@ -1075,7 +1075,7 @@
           <a:p>
             <a:fld id="{5BCAD085-E8A6-8845-BD4E-CB4CCA059FC4}" type="datetimeFigureOut">
               <a:rPr lang="en-US" smtClean="0"/>
-              <a:t>3/28/2026</a:t>
+              <a:t>3/30/2026</a:t>
             </a:fld>
             <a:endParaRPr lang="en-US"/>
           </a:p>
@@ -1360,7 +1360,7 @@
           <a:p>
             <a:fld id="{5BCAD085-E8A6-8845-BD4E-CB4CCA059FC4}" type="datetimeFigureOut">
               <a:rPr lang="en-US" smtClean="0"/>
-              <a:t>3/28/2026</a:t>
+              <a:t>3/30/2026</a:t>
             </a:fld>
             <a:endParaRPr lang="en-US"/>
           </a:p>
@@ -1779,7 +1779,7 @@
           <a:p>
             <a:fld id="{5BCAD085-E8A6-8845-BD4E-CB4CCA059FC4}" type="datetimeFigureOut">
               <a:rPr lang="en-US" smtClean="0"/>
-              <a:t>3/28/2026</a:t>
+              <a:t>3/30/2026</a:t>
             </a:fld>
             <a:endParaRPr lang="en-US"/>
           </a:p>
@@ -1896,7 +1896,7 @@
           <a:p>
             <a:fld id="{5BCAD085-E8A6-8845-BD4E-CB4CCA059FC4}" type="datetimeFigureOut">
               <a:rPr lang="en-US" smtClean="0"/>
-              <a:t>3/28/2026</a:t>
+              <a:t>3/30/2026</a:t>
             </a:fld>
             <a:endParaRPr lang="en-US"/>
           </a:p>
@@ -1991,7 +1991,7 @@
           <a:p>
             <a:fld id="{5BCAD085-E8A6-8845-BD4E-CB4CCA059FC4}" type="datetimeFigureOut">
               <a:rPr lang="en-US" smtClean="0"/>
-              <a:t>3/28/2026</a:t>
+              <a:t>3/30/2026</a:t>
             </a:fld>
             <a:endParaRPr lang="en-US"/>
           </a:p>
@@ -2266,7 +2266,7 @@
           <a:p>
             <a:fld id="{5BCAD085-E8A6-8845-BD4E-CB4CCA059FC4}" type="datetimeFigureOut">
               <a:rPr lang="en-US" smtClean="0"/>
-              <a:t>3/28/2026</a:t>
+              <a:t>3/30/2026</a:t>
             </a:fld>
             <a:endParaRPr lang="en-US"/>
           </a:p>
@@ -2518,7 +2518,7 @@
           <a:p>
             <a:fld id="{5BCAD085-E8A6-8845-BD4E-CB4CCA059FC4}" type="datetimeFigureOut">
               <a:rPr lang="en-US" smtClean="0"/>
-              <a:t>3/28/2026</a:t>
+              <a:t>3/30/2026</a:t>
             </a:fld>
             <a:endParaRPr lang="en-US"/>
           </a:p>
@@ -2729,7 +2729,7 @@
           <a:p>
             <a:fld id="{5BCAD085-E8A6-8845-BD4E-CB4CCA059FC4}" type="datetimeFigureOut">
               <a:rPr lang="en-US" smtClean="0"/>
-              <a:t>3/28/2026</a:t>
+              <a:t>3/30/2026</a:t>
             </a:fld>
             <a:endParaRPr lang="en-US"/>
           </a:p>
@@ -3121,34 +3121,6 @@
           <a:p>
             <a:r>
               <a:t>QOMOTech 软件使用说明</a:t>
-            </a:r>
-          </a:p>
-        </p:txBody>
-      </p:sp>
-      <p:sp>
-        <p:nvSpPr>
-          <p:cNvPr id="3" name="Subtitle 2"/>
-          <p:cNvSpPr>
-            <a:spLocks noGrp="1"/>
-          </p:cNvSpPr>
-          <p:nvPr>
-            <p:ph type="subTitle" idx="1"/>
-          </p:nvPr>
-        </p:nvSpPr>
-        <p:spPr/>
-        <p:txBody>
-          <a:bodyPr>
-            <a:normAutofit fontScale="92500"/>
-          </a:bodyPr>
-          <a:lstStyle/>
-          <a:p>
-            <a:r>
-              <a:t>机器人 / 运动控制上位机 · 版本 1.0.0</a:t>
-            </a:r>
-          </a:p>
-          <a:p>
-            <a:r>
-              <a:t>Electron 桌面端 + FastAPI 后端（ZMotion 运动控制）</a:t>
             </a:r>
           </a:p>
         </p:txBody>
